--- a/DataAnalysis_Track/decks/DA_S11_Comparing_groups_and_reading_time.pptx
+++ b/DataAnalysis_Track/decks/DA_S11_Comparing_groups_and_reading_time.pptx
@@ -482,7 +482,7 @@
 </file>
 
 <file path=ppt/notesSlides/notesSlide1.xml><?xml version="1.0" encoding="utf-8"?>
-<p:notes xmlns:a="http://schemas.openxmlformats.org/drawingml/2006/main" xmlns:p="http://schemas.openxmlformats.org/presentationml/2006/main" xmlns:r="http://schemas.openxmlformats.org/officeDocument/2006/relationships">
+<p:notes xmlns:a="http://schemas.openxmlformats.org/drawingml/2006/main" xmlns:p="http://schemas.openxmlformats.org/presentationml/2006/main">
   <p:cSld>
     <p:spTree>
       <p:nvGrpSpPr>
@@ -526,7 +526,87 @@
           <a:lstStyle/>
           <a:p>
             <a:r>
+              <a:t>TEACHING PURPOSE</a:t>
+            </a:r>
+          </a:p>
+          <a:p>
+            <a:r>
+              <a:t>Comparing groups, and reading time</a:t>
+            </a:r>
+          </a:p>
+          <a:p>
+            <a:r>
+              <a:t/>
+            </a:r>
+          </a:p>
+          <a:p>
+            <a:r>
+              <a:t>LECTURER CUE</a:t>
+            </a:r>
+          </a:p>
+          <a:p>
+            <a:r>
               <a:t>Start on time.</a:t>
+            </a:r>
+          </a:p>
+          <a:p>
+            <a:r>
+              <a:t/>
+            </a:r>
+          </a:p>
+          <a:p>
+            <a:r>
+              <a:t>EXPLAIN IN ORDINARY WORDS</a:t>
+            </a:r>
+          </a:p>
+          <a:p>
+            <a:r>
+              <a:t>A count says how much work there is. A rate divides events by the relevant opportunities or population. Both numerator and denominator must describe the same period and group.</a:t>
+            </a:r>
+          </a:p>
+          <a:p>
+            <a:r>
+              <a:t/>
+            </a:r>
+          </a:p>
+          <a:p>
+            <a:r>
+              <a:t>CHECK AND EXPECTED ANSWER</a:t>
+            </a:r>
+          </a:p>
+          <a:p>
+            <a:r>
+              <a:t>10 returns from 100 orders versus 20 from 1,000: rates are 10% and 2%. The second group has more returns but a lower rate.</a:t>
+            </a:r>
+          </a:p>
+          <a:p>
+            <a:r>
+              <a:t/>
+            </a:r>
+          </a:p>
+          <a:p>
+            <a:r>
+              <a:t>IF LEARNERS ARE STUCK</a:t>
+            </a:r>
+          </a:p>
+          <a:p>
+            <a:r>
+              <a:t>Write numerator and denominator in words before putting numbers into the fraction.</a:t>
+            </a:r>
+          </a:p>
+          <a:p>
+            <a:r>
+              <a:t/>
+            </a:r>
+          </a:p>
+          <a:p>
+            <a:r>
+              <a:t>NEXT</a:t>
+            </a:r>
+          </a:p>
+          <a:p>
+            <a:r>
+              <a:t>Where tonight sits. Move on after a learner can explain the current example or required action.</a:t>
             </a:r>
           </a:p>
         </p:txBody>
@@ -552,7 +632,7 @@
 </file>
 
 <file path=ppt/notesSlides/notesSlide10.xml><?xml version="1.0" encoding="utf-8"?>
-<p:notes xmlns:a="http://schemas.openxmlformats.org/drawingml/2006/main" xmlns:p="http://schemas.openxmlformats.org/presentationml/2006/main" xmlns:r="http://schemas.openxmlformats.org/officeDocument/2006/relationships">
+<p:notes xmlns:a="http://schemas.openxmlformats.org/drawingml/2006/main" xmlns:p="http://schemas.openxmlformats.org/presentationml/2006/main">
   <p:cSld>
     <p:spTree>
       <p:nvGrpSpPr>
@@ -596,7 +676,117 @@
           <a:lstStyle/>
           <a:p>
             <a:r>
+              <a:t>TEACHING PURPOSE</a:t>
+            </a:r>
+          </a:p>
+          <a:p>
+            <a:r>
+              <a:t>The most returns and the highest return rate are different regions</a:t>
+            </a:r>
+          </a:p>
+          <a:p>
+            <a:r>
+              <a:t/>
+            </a:r>
+          </a:p>
+          <a:p>
+            <a:r>
+              <a:t>CONNECT</a:t>
+            </a:r>
+          </a:p>
+          <a:p>
+            <a:r>
+              <a:t>Build on the preceding slide: Year on year.</a:t>
+            </a:r>
+          </a:p>
+          <a:p>
+            <a:r>
+              <a:t/>
+            </a:r>
+          </a:p>
+          <a:p>
+            <a:r>
+              <a:t>LECTURER CUE</a:t>
+            </a:r>
+          </a:p>
+          <a:p>
+            <a:r>
               <a:t>Real counts and rates from the course data. Report the counts and somebody is sent to Eastern, which simply has the most orders. The rate points at Western.</a:t>
+            </a:r>
+          </a:p>
+          <a:p>
+            <a:r>
+              <a:t/>
+            </a:r>
+          </a:p>
+          <a:p>
+            <a:r>
+              <a:t>EXPLAIN IN ORDINARY WORDS</a:t>
+            </a:r>
+          </a:p>
+          <a:p>
+            <a:r>
+              <a:t>A count says how much work there is. A rate divides events by the relevant opportunities or population. Both numerator and denominator must describe the same period and group.</a:t>
+            </a:r>
+          </a:p>
+          <a:p>
+            <a:r>
+              <a:t/>
+            </a:r>
+          </a:p>
+          <a:p>
+            <a:r>
+              <a:t>CHECK AND EXPECTED ANSWER</a:t>
+            </a:r>
+          </a:p>
+          <a:p>
+            <a:r>
+              <a:t>10 returns from 100 orders versus 20 from 1,000: rates are 10% and 2%. The second group has more returns but a lower rate.</a:t>
+            </a:r>
+          </a:p>
+          <a:p>
+            <a:r>
+              <a:t/>
+            </a:r>
+          </a:p>
+          <a:p>
+            <a:r>
+              <a:t>IF LEARNERS ARE STUCK</a:t>
+            </a:r>
+          </a:p>
+          <a:p>
+            <a:r>
+              <a:t>Write numerator and denominator in words before putting numbers into the fraction.</a:t>
+            </a:r>
+          </a:p>
+          <a:p>
+            <a:r>
+              <a:t/>
+            </a:r>
+          </a:p>
+          <a:p>
+            <a:r>
+              <a:t>READ THE VISUAL</a:t>
+            </a:r>
+          </a:p>
+          <a:p>
+            <a:r>
+              <a:t>Start with the title and labels. Read one row or mark aloud, including its unit. Let a learner read a second one before discussing the pattern. Do not infer a numerical value from an unlabelled drawing.</a:t>
+            </a:r>
+          </a:p>
+          <a:p>
+            <a:r>
+              <a:t/>
+            </a:r>
+          </a:p>
+          <a:p>
+            <a:r>
+              <a:t>NEXT</a:t>
+            </a:r>
+          </a:p>
+          <a:p>
+            <a:r>
+              <a:t>Counts and rates, side by side. Move on after a learner can explain the current example or required action.</a:t>
             </a:r>
           </a:p>
         </p:txBody>
@@ -621,8 +811,8 @@
 </p:notes>
 </file>
 
-<file path=ppt/notesSlides/notesSlide11.xml><?xml version="1.0" encoding="utf-8"?>
-<p:notes xmlns:a="http://schemas.openxmlformats.org/drawingml/2006/main" xmlns:p="http://schemas.openxmlformats.org/presentationml/2006/main" xmlns:r="http://schemas.openxmlformats.org/officeDocument/2006/relationships">
+<file path=ppt/notesSlides/notesSlide10006.xml><?xml version="1.0" encoding="utf-8"?>
+<p:notes xmlns:a="http://schemas.openxmlformats.org/drawingml/2006/main" xmlns:p="http://schemas.openxmlformats.org/presentationml/2006/main">
   <p:cSld>
     <p:spTree>
       <p:nvGrpSpPr>
@@ -664,7 +854,91 @@
         <p:txBody>
           <a:bodyPr/>
           <a:lstStyle/>
-          <a:p/>
+          <a:p>
+            <a:r>
+              <a:t>TEACHING PURPOSE</a:t>
+            </a:r>
+          </a:p>
+          <a:p>
+            <a:r>
+              <a:t>Counts, rates, and the difference that changes the decision</a:t>
+            </a:r>
+          </a:p>
+          <a:p>
+            <a:r>
+              <a:t/>
+            </a:r>
+          </a:p>
+          <a:p>
+            <a:r>
+              <a:t>CONNECT</a:t>
+            </a:r>
+          </a:p>
+          <a:p>
+            <a:r>
+              <a:t>Build on the preceding slide: Which region has our worst returns problem?.</a:t>
+            </a:r>
+          </a:p>
+          <a:p>
+            <a:r>
+              <a:t/>
+            </a:r>
+          </a:p>
+          <a:p>
+            <a:r>
+              <a:t>EXPLAIN IN ORDINARY WORDS</a:t>
+            </a:r>
+          </a:p>
+          <a:p>
+            <a:r>
+              <a:t>A count says how much work there is. A rate divides events by the relevant opportunities or population. Both numerator and denominator must describe the same period and group.</a:t>
+            </a:r>
+          </a:p>
+          <a:p>
+            <a:r>
+              <a:t/>
+            </a:r>
+          </a:p>
+          <a:p>
+            <a:r>
+              <a:t>CHECK AND EXPECTED ANSWER</a:t>
+            </a:r>
+          </a:p>
+          <a:p>
+            <a:r>
+              <a:t>10 returns from 100 orders versus 20 from 1,000: rates are 10% and 2%. The second group has more returns but a lower rate.</a:t>
+            </a:r>
+          </a:p>
+          <a:p>
+            <a:r>
+              <a:t/>
+            </a:r>
+          </a:p>
+          <a:p>
+            <a:r>
+              <a:t>IF LEARNERS ARE STUCK</a:t>
+            </a:r>
+          </a:p>
+          <a:p>
+            <a:r>
+              <a:t>Write numerator and denominator in words before putting numbers into the fraction.</a:t>
+            </a:r>
+          </a:p>
+          <a:p>
+            <a:r>
+              <a:t/>
+            </a:r>
+          </a:p>
+          <a:p>
+            <a:r>
+              <a:t>NEXT</a:t>
+            </a:r>
+          </a:p>
+          <a:p>
+            <a:r>
+              <a:t>A rate. Move on after a learner can explain the current example or required action.</a:t>
+            </a:r>
+          </a:p>
         </p:txBody>
       </p:sp>
       <p:sp>
@@ -687,8 +961,8 @@
 </p:notes>
 </file>
 
-<file path=ppt/notesSlides/notesSlide12.xml><?xml version="1.0" encoding="utf-8"?>
-<p:notes xmlns:a="http://schemas.openxmlformats.org/drawingml/2006/main" xmlns:p="http://schemas.openxmlformats.org/presentationml/2006/main" xmlns:r="http://schemas.openxmlformats.org/officeDocument/2006/relationships">
+<file path=ppt/notesSlides/notesSlide10014.xml><?xml version="1.0" encoding="utf-8"?>
+<p:notes xmlns:a="http://schemas.openxmlformats.org/drawingml/2006/main" xmlns:p="http://schemas.openxmlformats.org/presentationml/2006/main">
   <p:cSld>
     <p:spTree>
       <p:nvGrpSpPr>
@@ -732,7 +1006,57 @@
           <a:lstStyle/>
           <a:p>
             <a:r>
-              <a:t>Ten minutes.</a:t>
+              <a:t>TEACHING PURPOSE</a:t>
+            </a:r>
+          </a:p>
+          <a:p>
+            <a:r>
+              <a:t>Growth, or just December?</a:t>
+            </a:r>
+          </a:p>
+          <a:p>
+            <a:r>
+              <a:t/>
+            </a:r>
+          </a:p>
+          <a:p>
+            <a:r>
+              <a:t>CONNECT</a:t>
+            </a:r>
+          </a:p>
+          <a:p>
+            <a:r>
+              <a:t>Build on the preceding slide: Break.</a:t>
+            </a:r>
+          </a:p>
+          <a:p>
+            <a:r>
+              <a:t/>
+            </a:r>
+          </a:p>
+          <a:p>
+            <a:r>
+              <a:t>DELIVER THIS SLIDE</a:t>
+            </a:r>
+          </a:p>
+          <a:p>
+            <a:r>
+              <a:t>Read the stated purpose, then point to the named example or action on the slide. Ask learners to describe what they will do before moving on. For a break slide, announce the return time; for a section divider, name the next concrete task.</a:t>
+            </a:r>
+          </a:p>
+          <a:p>
+            <a:r>
+              <a:t/>
+            </a:r>
+          </a:p>
+          <a:p>
+            <a:r>
+              <a:t>NEXT</a:t>
+            </a:r>
+          </a:p>
+          <a:p>
+            <a:r>
+              <a:t>Percentages against percentage points. Move on after a learner can explain the current example or required action.</a:t>
             </a:r>
           </a:p>
         </p:txBody>
@@ -757,8 +1081,8 @@
 </p:notes>
 </file>
 
-<file path=ppt/notesSlides/notesSlide13.xml><?xml version="1.0" encoding="utf-8"?>
-<p:notes xmlns:a="http://schemas.openxmlformats.org/drawingml/2006/main" xmlns:p="http://schemas.openxmlformats.org/presentationml/2006/main" xmlns:r="http://schemas.openxmlformats.org/officeDocument/2006/relationships">
+<file path=ppt/notesSlides/notesSlide11.xml><?xml version="1.0" encoding="utf-8"?>
+<p:notes xmlns:a="http://schemas.openxmlformats.org/drawingml/2006/main" xmlns:p="http://schemas.openxmlformats.org/presentationml/2006/main">
   <p:cSld>
     <p:spTree>
       <p:nvGrpSpPr>
@@ -800,7 +1124,91 @@
         <p:txBody>
           <a:bodyPr/>
           <a:lstStyle/>
-          <a:p/>
+          <a:p>
+            <a:r>
+              <a:t>TEACHING PURPOSE</a:t>
+            </a:r>
+          </a:p>
+          <a:p>
+            <a:r>
+              <a:t>Counts and rates, side by side</a:t>
+            </a:r>
+          </a:p>
+          <a:p>
+            <a:r>
+              <a:t/>
+            </a:r>
+          </a:p>
+          <a:p>
+            <a:r>
+              <a:t>CONNECT</a:t>
+            </a:r>
+          </a:p>
+          <a:p>
+            <a:r>
+              <a:t>Build on the preceding slide: The most returns and the highest return rate are different regions.</a:t>
+            </a:r>
+          </a:p>
+          <a:p>
+            <a:r>
+              <a:t/>
+            </a:r>
+          </a:p>
+          <a:p>
+            <a:r>
+              <a:t>EXPLAIN IN ORDINARY WORDS</a:t>
+            </a:r>
+          </a:p>
+          <a:p>
+            <a:r>
+              <a:t>A count says how much work there is. A rate divides events by the relevant opportunities or population. Both numerator and denominator must describe the same period and group.</a:t>
+            </a:r>
+          </a:p>
+          <a:p>
+            <a:r>
+              <a:t/>
+            </a:r>
+          </a:p>
+          <a:p>
+            <a:r>
+              <a:t>CHECK AND EXPECTED ANSWER</a:t>
+            </a:r>
+          </a:p>
+          <a:p>
+            <a:r>
+              <a:t>10 returns from 100 orders versus 20 from 1,000: rates are 10% and 2%. The second group has more returns but a lower rate.</a:t>
+            </a:r>
+          </a:p>
+          <a:p>
+            <a:r>
+              <a:t/>
+            </a:r>
+          </a:p>
+          <a:p>
+            <a:r>
+              <a:t>IF LEARNERS ARE STUCK</a:t>
+            </a:r>
+          </a:p>
+          <a:p>
+            <a:r>
+              <a:t>Write numerator and denominator in words before putting numbers into the fraction.</a:t>
+            </a:r>
+          </a:p>
+          <a:p>
+            <a:r>
+              <a:t/>
+            </a:r>
+          </a:p>
+          <a:p>
+            <a:r>
+              <a:t>NEXT</a:t>
+            </a:r>
+          </a:p>
+          <a:p>
+            <a:r>
+              <a:t>Break. Move on after a learner can explain the current example or required action.</a:t>
+            </a:r>
+          </a:p>
         </p:txBody>
       </p:sp>
       <p:sp>
@@ -823,8 +1231,8 @@
 </p:notes>
 </file>
 
-<file path=ppt/notesSlides/notesSlide14.xml><?xml version="1.0" encoding="utf-8"?>
-<p:notes xmlns:a="http://schemas.openxmlformats.org/drawingml/2006/main" xmlns:p="http://schemas.openxmlformats.org/presentationml/2006/main" xmlns:r="http://schemas.openxmlformats.org/officeDocument/2006/relationships">
+<file path=ppt/notesSlides/notesSlide12.xml><?xml version="1.0" encoding="utf-8"?>
+<p:notes xmlns:a="http://schemas.openxmlformats.org/drawingml/2006/main" xmlns:p="http://schemas.openxmlformats.org/presentationml/2006/main">
   <p:cSld>
     <p:spTree>
       <p:nvGrpSpPr>
@@ -866,7 +1274,61 @@
         <p:txBody>
           <a:bodyPr/>
           <a:lstStyle/>
-          <a:p/>
+          <a:p>
+            <a:r>
+              <a:t>TEACHING PURPOSE</a:t>
+            </a:r>
+          </a:p>
+          <a:p>
+            <a:r>
+              <a:t>Break</a:t>
+            </a:r>
+          </a:p>
+          <a:p>
+            <a:r>
+              <a:t/>
+            </a:r>
+          </a:p>
+          <a:p>
+            <a:r>
+              <a:t>CONNECT</a:t>
+            </a:r>
+          </a:p>
+          <a:p>
+            <a:r>
+              <a:t>Build on the preceding slide: Counts and rates, side by side.</a:t>
+            </a:r>
+          </a:p>
+          <a:p>
+            <a:r>
+              <a:t/>
+            </a:r>
+          </a:p>
+          <a:p>
+            <a:r>
+              <a:t>LECTURER CUE</a:t>
+            </a:r>
+          </a:p>
+          <a:p>
+            <a:r>
+              <a:t>Ten minutes.</a:t>
+            </a:r>
+          </a:p>
+          <a:p>
+            <a:r>
+              <a:t/>
+            </a:r>
+          </a:p>
+          <a:p>
+            <a:r>
+              <a:t>NEXT</a:t>
+            </a:r>
+          </a:p>
+          <a:p>
+            <a:r>
+              <a:t>Growth, or just December?. Move on after a learner can explain the current example or required action.</a:t>
+            </a:r>
+          </a:p>
         </p:txBody>
       </p:sp>
       <p:sp>
@@ -889,8 +1351,8 @@
 </p:notes>
 </file>
 
-<file path=ppt/notesSlides/notesSlide15.xml><?xml version="1.0" encoding="utf-8"?>
-<p:notes xmlns:a="http://schemas.openxmlformats.org/drawingml/2006/main" xmlns:p="http://schemas.openxmlformats.org/presentationml/2006/main" xmlns:r="http://schemas.openxmlformats.org/officeDocument/2006/relationships">
+<file path=ppt/notesSlides/notesSlide13.xml><?xml version="1.0" encoding="utf-8"?>
+<p:notes xmlns:a="http://schemas.openxmlformats.org/drawingml/2006/main" xmlns:p="http://schemas.openxmlformats.org/presentationml/2006/main">
   <p:cSld>
     <p:spTree>
       <p:nvGrpSpPr>
@@ -934,7 +1396,87 @@
           <a:lstStyle/>
           <a:p>
             <a:r>
-              <a:t>Real monthly revenue with a three-month rolling average. The December peaks are the calendar, not growth, and the rolling average is what lets you see the difference.</a:t>
+              <a:t>TEACHING PURPOSE</a:t>
+            </a:r>
+          </a:p>
+          <a:p>
+            <a:r>
+              <a:t>Percentages against percentage points</a:t>
+            </a:r>
+          </a:p>
+          <a:p>
+            <a:r>
+              <a:t/>
+            </a:r>
+          </a:p>
+          <a:p>
+            <a:r>
+              <a:t>CONNECT</a:t>
+            </a:r>
+          </a:p>
+          <a:p>
+            <a:r>
+              <a:t>Build on the preceding slide: Growth, or just December?.</a:t>
+            </a:r>
+          </a:p>
+          <a:p>
+            <a:r>
+              <a:t/>
+            </a:r>
+          </a:p>
+          <a:p>
+            <a:r>
+              <a:t>EXPLAIN IN ORDINARY WORDS</a:t>
+            </a:r>
+          </a:p>
+          <a:p>
+            <a:r>
+              <a:t>A percentage is out of one hundred. Moving from 10% to 15% is an increase of 5 percentage points, but 50% relative to the original 10%.</a:t>
+            </a:r>
+          </a:p>
+          <a:p>
+            <a:r>
+              <a:t/>
+            </a:r>
+          </a:p>
+          <a:p>
+            <a:r>
+              <a:t>CHECK AND EXPECTED ANSWER</a:t>
+            </a:r>
+          </a:p>
+          <a:p>
+            <a:r>
+              <a:t>From 20% to 25%: how many percentage points? 5. Relative increase? 25%.</a:t>
+            </a:r>
+          </a:p>
+          <a:p>
+            <a:r>
+              <a:t/>
+            </a:r>
+          </a:p>
+          <a:p>
+            <a:r>
+              <a:t>IF LEARNERS ARE STUCK</a:t>
+            </a:r>
+          </a:p>
+          <a:p>
+            <a:r>
+              <a:t>Write the subtraction and the division separately; label their different units.</a:t>
+            </a:r>
+          </a:p>
+          <a:p>
+            <a:r>
+              <a:t/>
+            </a:r>
+          </a:p>
+          <a:p>
+            <a:r>
+              <a:t>NEXT</a:t>
+            </a:r>
+          </a:p>
+          <a:p>
+            <a:r>
+              <a:t>Trend, or the calendar?. Move on after a learner can explain the current example or required action.</a:t>
             </a:r>
           </a:p>
         </p:txBody>
@@ -959,8 +1501,8 @@
 </p:notes>
 </file>
 
-<file path=ppt/notesSlides/notesSlide16.xml><?xml version="1.0" encoding="utf-8"?>
-<p:notes xmlns:a="http://schemas.openxmlformats.org/drawingml/2006/main" xmlns:p="http://schemas.openxmlformats.org/presentationml/2006/main" xmlns:r="http://schemas.openxmlformats.org/officeDocument/2006/relationships">
+<file path=ppt/notesSlides/notesSlide14.xml><?xml version="1.0" encoding="utf-8"?>
+<p:notes xmlns:a="http://schemas.openxmlformats.org/drawingml/2006/main" xmlns:p="http://schemas.openxmlformats.org/presentationml/2006/main">
   <p:cSld>
     <p:spTree>
       <p:nvGrpSpPr>
@@ -1004,7 +1546,87 @@
           <a:lstStyle/>
           <a:p>
             <a:r>
-              <a:t>For each: supported, unsupported, or unanswerable from this data. Attach a number to every verdict.</a:t>
+              <a:t>TEACHING PURPOSE</a:t>
+            </a:r>
+          </a:p>
+          <a:p>
+            <a:r>
+              <a:t>Trend, or the calendar?</a:t>
+            </a:r>
+          </a:p>
+          <a:p>
+            <a:r>
+              <a:t/>
+            </a:r>
+          </a:p>
+          <a:p>
+            <a:r>
+              <a:t>CONNECT</a:t>
+            </a:r>
+          </a:p>
+          <a:p>
+            <a:r>
+              <a:t>Build on the preceding slide: Percentages against percentage points.</a:t>
+            </a:r>
+          </a:p>
+          <a:p>
+            <a:r>
+              <a:t/>
+            </a:r>
+          </a:p>
+          <a:p>
+            <a:r>
+              <a:t>EXPLAIN IN ORDINARY WORDS</a:t>
+            </a:r>
+          </a:p>
+          <a:p>
+            <a:r>
+              <a:t>A seasonal pattern repeats at calendar intervals. Compare like periods before calling a change growth; compare counts, coverage and definitions as well.</a:t>
+            </a:r>
+          </a:p>
+          <a:p>
+            <a:r>
+              <a:t/>
+            </a:r>
+          </a:p>
+          <a:p>
+            <a:r>
+              <a:t>CHECK AND EXPECTED ANSWER</a:t>
+            </a:r>
+          </a:p>
+          <a:p>
+            <a:r>
+              <a:t>Does a rise from November to December prove underlying growth? No; compare comparable Decembers and inspect the wider series.</a:t>
+            </a:r>
+          </a:p>
+          <a:p>
+            <a:r>
+              <a:t/>
+            </a:r>
+          </a:p>
+          <a:p>
+            <a:r>
+              <a:t>IF LEARNERS ARE STUCK</a:t>
+            </a:r>
+          </a:p>
+          <a:p>
+            <a:r>
+              <a:t>Draw a two-year timeline and match the same months. Separate description from an explanation of cause.</a:t>
+            </a:r>
+          </a:p>
+          <a:p>
+            <a:r>
+              <a:t/>
+            </a:r>
+          </a:p>
+          <a:p>
+            <a:r>
+              <a:t>NEXT</a:t>
+            </a:r>
+          </a:p>
+          <a:p>
+            <a:r>
+              <a:t>December is the biggest month in both years. Move on after a learner can explain the current example or required action.</a:t>
             </a:r>
           </a:p>
         </p:txBody>
@@ -1029,8 +1651,8 @@
 </p:notes>
 </file>
 
-<file path=ppt/notesSlides/notesSlide17.xml><?xml version="1.0" encoding="utf-8"?>
-<p:notes xmlns:a="http://schemas.openxmlformats.org/drawingml/2006/main" xmlns:p="http://schemas.openxmlformats.org/presentationml/2006/main" xmlns:r="http://schemas.openxmlformats.org/officeDocument/2006/relationships">
+<file path=ppt/notesSlides/notesSlide15.xml><?xml version="1.0" encoding="utf-8"?>
+<p:notes xmlns:a="http://schemas.openxmlformats.org/drawingml/2006/main" xmlns:p="http://schemas.openxmlformats.org/presentationml/2006/main">
   <p:cSld>
     <p:spTree>
       <p:nvGrpSpPr>
@@ -1074,7 +1696,117 @@
           <a:lstStyle/>
           <a:p>
             <a:r>
-              <a:t>Reporting a count where the audience will read a rate, and calling a seasonal peak growth.</a:t>
+              <a:t>TEACHING PURPOSE</a:t>
+            </a:r>
+          </a:p>
+          <a:p>
+            <a:r>
+              <a:t>December is the biggest month in both years</a:t>
+            </a:r>
+          </a:p>
+          <a:p>
+            <a:r>
+              <a:t/>
+            </a:r>
+          </a:p>
+          <a:p>
+            <a:r>
+              <a:t>CONNECT</a:t>
+            </a:r>
+          </a:p>
+          <a:p>
+            <a:r>
+              <a:t>Build on the preceding slide: Trend, or the calendar?.</a:t>
+            </a:r>
+          </a:p>
+          <a:p>
+            <a:r>
+              <a:t/>
+            </a:r>
+          </a:p>
+          <a:p>
+            <a:r>
+              <a:t>LECTURER CUE</a:t>
+            </a:r>
+          </a:p>
+          <a:p>
+            <a:r>
+              <a:t>Real monthly revenue with a three-month rolling average. The December peaks are the calendar, not growth, and the rolling average is what lets you see the difference.</a:t>
+            </a:r>
+          </a:p>
+          <a:p>
+            <a:r>
+              <a:t/>
+            </a:r>
+          </a:p>
+          <a:p>
+            <a:r>
+              <a:t>EXPLAIN IN ORDINARY WORDS</a:t>
+            </a:r>
+          </a:p>
+          <a:p>
+            <a:r>
+              <a:t>A seasonal pattern repeats at calendar intervals. Compare like periods before calling a change growth; compare counts, coverage and definitions as well.</a:t>
+            </a:r>
+          </a:p>
+          <a:p>
+            <a:r>
+              <a:t/>
+            </a:r>
+          </a:p>
+          <a:p>
+            <a:r>
+              <a:t>CHECK AND EXPECTED ANSWER</a:t>
+            </a:r>
+          </a:p>
+          <a:p>
+            <a:r>
+              <a:t>Does a rise from November to December prove underlying growth? No; compare comparable Decembers and inspect the wider series.</a:t>
+            </a:r>
+          </a:p>
+          <a:p>
+            <a:r>
+              <a:t/>
+            </a:r>
+          </a:p>
+          <a:p>
+            <a:r>
+              <a:t>IF LEARNERS ARE STUCK</a:t>
+            </a:r>
+          </a:p>
+          <a:p>
+            <a:r>
+              <a:t>Draw a two-year timeline and match the same months. Separate description from an explanation of cause.</a:t>
+            </a:r>
+          </a:p>
+          <a:p>
+            <a:r>
+              <a:t/>
+            </a:r>
+          </a:p>
+          <a:p>
+            <a:r>
+              <a:t>READ THE VISUAL</a:t>
+            </a:r>
+          </a:p>
+          <a:p>
+            <a:r>
+              <a:t>Start with the title and labels. Read one row or mark aloud, including its unit. Let a learner read a second one before discussing the pattern. Do not infer a numerical value from an unlabelled drawing.</a:t>
+            </a:r>
+          </a:p>
+          <a:p>
+            <a:r>
+              <a:t/>
+            </a:r>
+          </a:p>
+          <a:p>
+            <a:r>
+              <a:t>NEXT</a:t>
+            </a:r>
+          </a:p>
+          <a:p>
+            <a:r>
+              <a:t>Five statements, five verdicts. Move on after a learner can explain the current example or required action.</a:t>
             </a:r>
           </a:p>
         </p:txBody>
@@ -1099,8 +1831,8 @@
 </p:notes>
 </file>
 
-<file path=ppt/notesSlides/notesSlide18.xml><?xml version="1.0" encoding="utf-8"?>
-<p:notes xmlns:a="http://schemas.openxmlformats.org/drawingml/2006/main" xmlns:p="http://schemas.openxmlformats.org/presentationml/2006/main" xmlns:r="http://schemas.openxmlformats.org/officeDocument/2006/relationships">
+<file path=ppt/notesSlides/notesSlide16.xml><?xml version="1.0" encoding="utf-8"?>
+<p:notes xmlns:a="http://schemas.openxmlformats.org/drawingml/2006/main" xmlns:p="http://schemas.openxmlformats.org/presentationml/2006/main">
   <p:cSld>
     <p:spTree>
       <p:nvGrpSpPr>
@@ -1142,7 +1874,106 @@
         <p:txBody>
           <a:bodyPr/>
           <a:lstStyle/>
-          <a:p/>
+          <a:p>
+            <a:r>
+              <a:t>TEACHING PURPOSE</a:t>
+            </a:r>
+          </a:p>
+          <a:p>
+            <a:r>
+              <a:t>Five statements, five verdicts</a:t>
+            </a:r>
+          </a:p>
+          <a:p>
+            <a:r>
+              <a:t/>
+            </a:r>
+          </a:p>
+          <a:p>
+            <a:r>
+              <a:t>CONNECT</a:t>
+            </a:r>
+          </a:p>
+          <a:p>
+            <a:r>
+              <a:t>Build on the preceding slide: December is the biggest month in both years.</a:t>
+            </a:r>
+          </a:p>
+          <a:p>
+            <a:r>
+              <a:t/>
+            </a:r>
+          </a:p>
+          <a:p>
+            <a:r>
+              <a:t>LECTURER CUE</a:t>
+            </a:r>
+          </a:p>
+          <a:p>
+            <a:r>
+              <a:t>For each: supported, unsupported, or unanswerable from this data. Attach a number to every verdict.</a:t>
+            </a:r>
+          </a:p>
+          <a:p>
+            <a:r>
+              <a:t/>
+            </a:r>
+          </a:p>
+          <a:p>
+            <a:r>
+              <a:t>EXPLAIN IN ORDINARY WORDS</a:t>
+            </a:r>
+          </a:p>
+          <a:p>
+            <a:r>
+              <a:t>Mean is total divided by count. Median is the middle of sorted values. A percentile locates a position in that ordered distribution; interpolation conventions can differ. Match the summary to the question.</a:t>
+            </a:r>
+          </a:p>
+          <a:p>
+            <a:r>
+              <a:t/>
+            </a:r>
+          </a:p>
+          <a:p>
+            <a:r>
+              <a:t>CHECK AND EXPECTED ANSWER</a:t>
+            </a:r>
+          </a:p>
+          <a:p>
+            <a:r>
+              <a:t>For [2,3,4,5,100], median=4 and mean=22.8. The large value pulls the mean up.</a:t>
+            </a:r>
+          </a:p>
+          <a:p>
+            <a:r>
+              <a:t/>
+            </a:r>
+          </a:p>
+          <a:p>
+            <a:r>
+              <a:t>IF LEARNERS ARE STUCK</a:t>
+            </a:r>
+          </a:p>
+          <a:p>
+            <a:r>
+              <a:t>Sort five values by hand. A skewed distribution does not make the mean wrong if the question concerns totals or expected cost.</a:t>
+            </a:r>
+          </a:p>
+          <a:p>
+            <a:r>
+              <a:t/>
+            </a:r>
+          </a:p>
+          <a:p>
+            <a:r>
+              <a:t>NEXT</a:t>
+            </a:r>
+          </a:p>
+          <a:p>
+            <a:r>
+              <a:t>Reporting a count where the audience will read a rate, and calling a seasonal peak growth.. Move on after a learner can explain the current example or required action.</a:t>
+            </a:r>
+          </a:p>
         </p:txBody>
       </p:sp>
       <p:sp>
@@ -1165,8 +1996,8 @@
 </p:notes>
 </file>
 
-<file path=ppt/notesSlides/notesSlide19.xml><?xml version="1.0" encoding="utf-8"?>
-<p:notes xmlns:a="http://schemas.openxmlformats.org/drawingml/2006/main" xmlns:p="http://schemas.openxmlformats.org/presentationml/2006/main" xmlns:r="http://schemas.openxmlformats.org/officeDocument/2006/relationships">
+<file path=ppt/notesSlides/notesSlide17.xml><?xml version="1.0" encoding="utf-8"?>
+<p:notes xmlns:a="http://schemas.openxmlformats.org/drawingml/2006/main" xmlns:p="http://schemas.openxmlformats.org/presentationml/2006/main">
   <p:cSld>
     <p:spTree>
       <p:nvGrpSpPr>
@@ -1208,7 +2039,106 @@
         <p:txBody>
           <a:bodyPr/>
           <a:lstStyle/>
-          <a:p/>
+          <a:p>
+            <a:r>
+              <a:t>TEACHING PURPOSE</a:t>
+            </a:r>
+          </a:p>
+          <a:p>
+            <a:r>
+              <a:t>Reporting a count where the audience will read a rate, and calling a seasonal peak growth.</a:t>
+            </a:r>
+          </a:p>
+          <a:p>
+            <a:r>
+              <a:t/>
+            </a:r>
+          </a:p>
+          <a:p>
+            <a:r>
+              <a:t>CONNECT</a:t>
+            </a:r>
+          </a:p>
+          <a:p>
+            <a:r>
+              <a:t>Build on the preceding slide: Five statements, five verdicts.</a:t>
+            </a:r>
+          </a:p>
+          <a:p>
+            <a:r>
+              <a:t/>
+            </a:r>
+          </a:p>
+          <a:p>
+            <a:r>
+              <a:t>LECTURER CUE</a:t>
+            </a:r>
+          </a:p>
+          <a:p>
+            <a:r>
+              <a:t>Reporting a count where the audience will read a rate, and calling a seasonal peak growth.</a:t>
+            </a:r>
+          </a:p>
+          <a:p>
+            <a:r>
+              <a:t/>
+            </a:r>
+          </a:p>
+          <a:p>
+            <a:r>
+              <a:t>EXPLAIN IN ORDINARY WORDS</a:t>
+            </a:r>
+          </a:p>
+          <a:p>
+            <a:r>
+              <a:t>A count says how much work there is. A rate divides events by the relevant opportunities or population. Both numerator and denominator must describe the same period and group.</a:t>
+            </a:r>
+          </a:p>
+          <a:p>
+            <a:r>
+              <a:t/>
+            </a:r>
+          </a:p>
+          <a:p>
+            <a:r>
+              <a:t>CHECK AND EXPECTED ANSWER</a:t>
+            </a:r>
+          </a:p>
+          <a:p>
+            <a:r>
+              <a:t>10 returns from 100 orders versus 20 from 1,000: rates are 10% and 2%. The second group has more returns but a lower rate.</a:t>
+            </a:r>
+          </a:p>
+          <a:p>
+            <a:r>
+              <a:t/>
+            </a:r>
+          </a:p>
+          <a:p>
+            <a:r>
+              <a:t>IF LEARNERS ARE STUCK</a:t>
+            </a:r>
+          </a:p>
+          <a:p>
+            <a:r>
+              <a:t>Write numerator and denominator in words before putting numbers into the fraction.</a:t>
+            </a:r>
+          </a:p>
+          <a:p>
+            <a:r>
+              <a:t/>
+            </a:r>
+          </a:p>
+          <a:p>
+            <a:r>
+              <a:t>NEXT</a:t>
+            </a:r>
+          </a:p>
+          <a:p>
+            <a:r>
+              <a:t>Can you answer these?. Move on after a learner can explain the current example or required action.</a:t>
+            </a:r>
+          </a:p>
         </p:txBody>
       </p:sp>
       <p:sp>
@@ -1231,8 +2161,8 @@
 </p:notes>
 </file>
 
-<file path=ppt/notesSlides/notesSlide2.xml><?xml version="1.0" encoding="utf-8"?>
-<p:notes xmlns:a="http://schemas.openxmlformats.org/drawingml/2006/main" xmlns:p="http://schemas.openxmlformats.org/presentationml/2006/main" xmlns:r="http://schemas.openxmlformats.org/officeDocument/2006/relationships">
+<file path=ppt/notesSlides/notesSlide18.xml><?xml version="1.0" encoding="utf-8"?>
+<p:notes xmlns:a="http://schemas.openxmlformats.org/drawingml/2006/main" xmlns:p="http://schemas.openxmlformats.org/presentationml/2006/main">
   <p:cSld>
     <p:spTree>
       <p:nvGrpSpPr>
@@ -1276,7 +2206,157 @@
           <a:lstStyle/>
           <a:p>
             <a:r>
-              <a:t>Tonight is session 11 of twelve.</a:t>
+              <a:t>TEACHING PURPOSE</a:t>
+            </a:r>
+          </a:p>
+          <a:p>
+            <a:r>
+              <a:t>Can you answer these?</a:t>
+            </a:r>
+          </a:p>
+          <a:p>
+            <a:r>
+              <a:t/>
+            </a:r>
+          </a:p>
+          <a:p>
+            <a:r>
+              <a:t>CONNECT</a:t>
+            </a:r>
+          </a:p>
+          <a:p>
+            <a:r>
+              <a:t>Build on the preceding slide: Reporting a count where the audience will read a rate, and calling a seasonal peak growth..</a:t>
+            </a:r>
+          </a:p>
+          <a:p>
+            <a:r>
+              <a:t/>
+            </a:r>
+          </a:p>
+          <a:p>
+            <a:r>
+              <a:t>EXPLAIN IN ORDINARY WORDS</a:t>
+            </a:r>
+          </a:p>
+          <a:p>
+            <a:r>
+              <a:t>A count says how much work there is. A rate divides events by the relevant opportunities or population. Both numerator and denominator must describe the same period and group.</a:t>
+            </a:r>
+          </a:p>
+          <a:p>
+            <a:r>
+              <a:t/>
+            </a:r>
+          </a:p>
+          <a:p>
+            <a:r>
+              <a:t>CHECK AND EXPECTED ANSWER</a:t>
+            </a:r>
+          </a:p>
+          <a:p>
+            <a:r>
+              <a:t>10 returns from 100 orders versus 20 from 1,000: rates are 10% and 2%. The second group has more returns but a lower rate.</a:t>
+            </a:r>
+          </a:p>
+          <a:p>
+            <a:r>
+              <a:t/>
+            </a:r>
+          </a:p>
+          <a:p>
+            <a:r>
+              <a:t>IF LEARNERS ARE STUCK</a:t>
+            </a:r>
+          </a:p>
+          <a:p>
+            <a:r>
+              <a:t>Write numerator and denominator in words before putting numbers into the fraction.</a:t>
+            </a:r>
+          </a:p>
+          <a:p>
+            <a:r>
+              <a:t/>
+            </a:r>
+          </a:p>
+          <a:p>
+            <a:r>
+              <a:t>DISCUSSION KEY FOR THIS SLIDE</a:t>
+            </a:r>
+          </a:p>
+          <a:p>
+            <a:r>
+              <a:t>ANSWERS</a:t>
+            </a:r>
+          </a:p>
+          <a:p>
+            <a:r>
+              <a:t>How did you do?</a:t>
+            </a:r>
+          </a:p>
+          <a:p>
+            <a:r>
+              <a:t>A</a:t>
+            </a:r>
+          </a:p>
+          <a:p>
+            <a:r>
+              <a:t>When a count beats a rate</a:t>
+            </a:r>
+          </a:p>
+          <a:p>
+            <a:r>
+              <a:t>When the work is proportional to the count: staffing a returns desk, printing labels, answering calls. Eastern needs the people even though Western has the problem. Report both and say which question each answers.</a:t>
+            </a:r>
+          </a:p>
+          <a:p>
+            <a:r>
+              <a:t>B</a:t>
+            </a:r>
+          </a:p>
+          <a:p>
+            <a:r>
+              <a:t>2% to 3%: one or fifty?</a:t>
+            </a:r>
+          </a:p>
+          <a:p>
+            <a:r>
+              <a:t>Both. One percentage POINT, and fifty per cent in relative terms. Neither is wrong and the unit has to be stated, because the two sound completely different to a reader.</a:t>
+            </a:r>
+          </a:p>
+          <a:p>
+            <a:r>
+              <a:t>C</a:t>
+            </a:r>
+          </a:p>
+          <a:p>
+            <a:r>
+              <a:t>One check for growth against seasonality</a:t>
+            </a:r>
+          </a:p>
+          <a:p>
+            <a:r>
+              <a:t>Compare the same month a year apart. If December beats February in both years by a similar factor, it is the calendar rather than the business.</a:t>
+            </a:r>
+          </a:p>
+          <a:p>
+            <a:r>
+              <a:t>Let learners attempt first; use this to explain the reasoning, not just reveal the answer.</a:t>
+            </a:r>
+          </a:p>
+          <a:p>
+            <a:r>
+              <a:t/>
+            </a:r>
+          </a:p>
+          <a:p>
+            <a:r>
+              <a:t>NEXT</a:t>
+            </a:r>
+          </a:p>
+          <a:p>
+            <a:r>
+              <a:t>How did you do?. Move on after a learner can explain the current example or required action.</a:t>
             </a:r>
           </a:p>
         </p:txBody>
@@ -1301,8 +2381,8 @@
 </p:notes>
 </file>
 
-<file path=ppt/notesSlides/notesSlide20.xml><?xml version="1.0" encoding="utf-8"?>
-<p:notes xmlns:a="http://schemas.openxmlformats.org/drawingml/2006/main" xmlns:p="http://schemas.openxmlformats.org/presentationml/2006/main" xmlns:r="http://schemas.openxmlformats.org/officeDocument/2006/relationships">
+<file path=ppt/notesSlides/notesSlide19.xml><?xml version="1.0" encoding="utf-8"?>
+<p:notes xmlns:a="http://schemas.openxmlformats.org/drawingml/2006/main" xmlns:p="http://schemas.openxmlformats.org/presentationml/2006/main">
   <p:cSld>
     <p:spTree>
       <p:nvGrpSpPr>
@@ -1346,7 +2426,87 @@
           <a:lstStyle/>
           <a:p>
             <a:r>
-              <a:t>On your sheet are five statements about this business. Decide which are supported, which are unsupported and which are unanswerable, and attach a number to every verdict. Unanswerable is a real answer and one of them is.</a:t>
+              <a:t>TEACHING PURPOSE</a:t>
+            </a:r>
+          </a:p>
+          <a:p>
+            <a:r>
+              <a:t>How did you do?</a:t>
+            </a:r>
+          </a:p>
+          <a:p>
+            <a:r>
+              <a:t/>
+            </a:r>
+          </a:p>
+          <a:p>
+            <a:r>
+              <a:t>CONNECT</a:t>
+            </a:r>
+          </a:p>
+          <a:p>
+            <a:r>
+              <a:t>Build on the preceding slide: Can you answer these?.</a:t>
+            </a:r>
+          </a:p>
+          <a:p>
+            <a:r>
+              <a:t/>
+            </a:r>
+          </a:p>
+          <a:p>
+            <a:r>
+              <a:t>EXPLAIN IN ORDINARY WORDS</a:t>
+            </a:r>
+          </a:p>
+          <a:p>
+            <a:r>
+              <a:t>A percentage is out of one hundred. Moving from 10% to 15% is an increase of 5 percentage points, but 50% relative to the original 10%.</a:t>
+            </a:r>
+          </a:p>
+          <a:p>
+            <a:r>
+              <a:t/>
+            </a:r>
+          </a:p>
+          <a:p>
+            <a:r>
+              <a:t>CHECK AND EXPECTED ANSWER</a:t>
+            </a:r>
+          </a:p>
+          <a:p>
+            <a:r>
+              <a:t>From 20% to 25%: how many percentage points? 5. Relative increase? 25%.</a:t>
+            </a:r>
+          </a:p>
+          <a:p>
+            <a:r>
+              <a:t/>
+            </a:r>
+          </a:p>
+          <a:p>
+            <a:r>
+              <a:t>IF LEARNERS ARE STUCK</a:t>
+            </a:r>
+          </a:p>
+          <a:p>
+            <a:r>
+              <a:t>Write the subtraction and the division separately; label their different units.</a:t>
+            </a:r>
+          </a:p>
+          <a:p>
+            <a:r>
+              <a:t/>
+            </a:r>
+          </a:p>
+          <a:p>
+            <a:r>
+              <a:t>NEXT</a:t>
+            </a:r>
+          </a:p>
+          <a:p>
+            <a:r>
+              <a:t>Five statements, five verdicts, with numbers. Move on after a learner can explain the current example or required action.</a:t>
             </a:r>
           </a:p>
         </p:txBody>
@@ -1371,8 +2531,8 @@
 </p:notes>
 </file>
 
-<file path=ppt/notesSlides/notesSlide21.xml><?xml version="1.0" encoding="utf-8"?>
-<p:notes xmlns:a="http://schemas.openxmlformats.org/drawingml/2006/main" xmlns:p="http://schemas.openxmlformats.org/presentationml/2006/main" xmlns:r="http://schemas.openxmlformats.org/officeDocument/2006/relationships">
+<file path=ppt/notesSlides/notesSlide2.xml><?xml version="1.0" encoding="utf-8"?>
+<p:notes xmlns:a="http://schemas.openxmlformats.org/drawingml/2006/main" xmlns:p="http://schemas.openxmlformats.org/presentationml/2006/main">
   <p:cSld>
     <p:spTree>
       <p:nvGrpSpPr>
@@ -1414,7 +2574,106 @@
         <p:txBody>
           <a:bodyPr/>
           <a:lstStyle/>
-          <a:p/>
+          <a:p>
+            <a:r>
+              <a:t>TEACHING PURPOSE</a:t>
+            </a:r>
+          </a:p>
+          <a:p>
+            <a:r>
+              <a:t>Where tonight sits</a:t>
+            </a:r>
+          </a:p>
+          <a:p>
+            <a:r>
+              <a:t/>
+            </a:r>
+          </a:p>
+          <a:p>
+            <a:r>
+              <a:t>CONNECT</a:t>
+            </a:r>
+          </a:p>
+          <a:p>
+            <a:r>
+              <a:t>Build on the preceding slide: Comparing groups, and reading time.</a:t>
+            </a:r>
+          </a:p>
+          <a:p>
+            <a:r>
+              <a:t/>
+            </a:r>
+          </a:p>
+          <a:p>
+            <a:r>
+              <a:t>LECTURER CUE</a:t>
+            </a:r>
+          </a:p>
+          <a:p>
+            <a:r>
+              <a:t>Tonight is session 11 of fifteen.</a:t>
+            </a:r>
+          </a:p>
+          <a:p>
+            <a:r>
+              <a:t/>
+            </a:r>
+          </a:p>
+          <a:p>
+            <a:r>
+              <a:t>EXPLAIN IN ORDINARY WORDS</a:t>
+            </a:r>
+          </a:p>
+          <a:p>
+            <a:r>
+              <a:t>Grain means what one row represents. A key identifies a row; a primary key may use more than one column. A join matches keys, and multiple matches can multiply rows.</a:t>
+            </a:r>
+          </a:p>
+          <a:p>
+            <a:r>
+              <a:t/>
+            </a:r>
+          </a:p>
+          <a:p>
+            <a:r>
+              <a:t>CHECK AND EXPECTED ANSWER</a:t>
+            </a:r>
+          </a:p>
+          <a:p>
+            <a:r>
+              <a:t>One order has two lines. After joining orders to lines, how many rows for it? Two. Summing a repeated order-level total would double-count.</a:t>
+            </a:r>
+          </a:p>
+          <a:p>
+            <a:r>
+              <a:t/>
+            </a:r>
+          </a:p>
+          <a:p>
+            <a:r>
+              <a:t>IF LEARNERS ARE STUCK</a:t>
+            </a:r>
+          </a:p>
+          <a:p>
+            <a:r>
+              <a:t>Write one example row from each table. Circle keys and trace each match. Aggregate to the intended grain and check counts and totals.</a:t>
+            </a:r>
+          </a:p>
+          <a:p>
+            <a:r>
+              <a:t/>
+            </a:r>
+          </a:p>
+          <a:p>
+            <a:r>
+              <a:t>NEXT</a:t>
+            </a:r>
+          </a:p>
+          <a:p>
+            <a:r>
+              <a:t>The words for tonight. Move on after a learner can explain the current example or required action.</a:t>
+            </a:r>
+          </a:p>
         </p:txBody>
       </p:sp>
       <p:sp>
@@ -1437,8 +2696,8 @@
 </p:notes>
 </file>
 
-<file path=ppt/notesSlides/notesSlide22.xml><?xml version="1.0" encoding="utf-8"?>
-<p:notes xmlns:a="http://schemas.openxmlformats.org/drawingml/2006/main" xmlns:p="http://schemas.openxmlformats.org/presentationml/2006/main" xmlns:r="http://schemas.openxmlformats.org/officeDocument/2006/relationships">
+<file path=ppt/notesSlides/notesSlide20.xml><?xml version="1.0" encoding="utf-8"?>
+<p:notes xmlns:a="http://schemas.openxmlformats.org/drawingml/2006/main" xmlns:p="http://schemas.openxmlformats.org/presentationml/2006/main">
   <p:cSld>
     <p:spTree>
       <p:nvGrpSpPr>
@@ -1482,7 +2741,102 @@
           <a:lstStyle/>
           <a:p>
             <a:r>
-              <a:t>Find a percentage quoted at work and decide whether it should have been a percentage point, a rate, or a count.</a:t>
+              <a:t>TEACHING PURPOSE</a:t>
+            </a:r>
+          </a:p>
+          <a:p>
+            <a:r>
+              <a:t>Five statements, five verdicts, with numbers</a:t>
+            </a:r>
+          </a:p>
+          <a:p>
+            <a:r>
+              <a:t/>
+            </a:r>
+          </a:p>
+          <a:p>
+            <a:r>
+              <a:t>CONNECT</a:t>
+            </a:r>
+          </a:p>
+          <a:p>
+            <a:r>
+              <a:t>Build on the preceding slide: How did you do?.</a:t>
+            </a:r>
+          </a:p>
+          <a:p>
+            <a:r>
+              <a:t/>
+            </a:r>
+          </a:p>
+          <a:p>
+            <a:r>
+              <a:t>LECTURER CUE</a:t>
+            </a:r>
+          </a:p>
+          <a:p>
+            <a:r>
+              <a:t>On your sheet are five statements about this business. Decide which are supported, which are unsupported and which are unanswerable, and attach a number to every verdict. Unanswerable is a real answer and one of them is.</a:t>
+            </a:r>
+          </a:p>
+          <a:p>
+            <a:r>
+              <a:t/>
+            </a:r>
+          </a:p>
+          <a:p>
+            <a:r>
+              <a:t>EXPLAIN IN ORDINARY WORDS</a:t>
+            </a:r>
+          </a:p>
+          <a:p>
+            <a:r>
+              <a:t>Missing means not recorded, not automatically zero. Decide why it is missing and document the rule. Fitted fill values must come from training data when evaluating a model.</a:t>
+            </a:r>
+          </a:p>
+          <a:p>
+            <a:r>
+              <a:t/>
+            </a:r>
+          </a:p>
+          <a:p>
+            <a:r>
+              <a:t>CHECK AND EXPECTED ANSWER</a:t>
+            </a:r>
+          </a:p>
+          <a:p>
+            <a:r>
+              <a:t>Is an unrecorded energy reading evidence of zero consumption? No.</a:t>
+            </a:r>
+          </a:p>
+          <a:p>
+            <a:r>
+              <a:t/>
+            </a:r>
+          </a:p>
+          <a:p>
+            <a:r>
+              <a:t>IF LEARNERS ARE STUCK</a:t>
+            </a:r>
+          </a:p>
+          <a:p>
+            <a:r>
+              <a:t>Use three rows: a recorded zero, a recorded positive value and a blank. Explain their different meanings before cleaning.</a:t>
+            </a:r>
+          </a:p>
+          <a:p>
+            <a:r>
+              <a:t/>
+            </a:r>
+          </a:p>
+          <a:p>
+            <a:r>
+              <a:t>NEXT</a:t>
+            </a:r>
+          </a:p>
+          <a:p>
+            <a:r>
+              <a:t>What you can do now. Move on after a learner can explain the current example or required action.</a:t>
             </a:r>
           </a:p>
         </p:txBody>
@@ -1507,8 +2861,8 @@
 </p:notes>
 </file>
 
-<file path=ppt/notesSlides/notesSlide23.xml><?xml version="1.0" encoding="utf-8"?>
-<p:notes xmlns:a="http://schemas.openxmlformats.org/drawingml/2006/main" xmlns:p="http://schemas.openxmlformats.org/presentationml/2006/main" xmlns:r="http://schemas.openxmlformats.org/officeDocument/2006/relationships">
+<file path=ppt/notesSlides/notesSlide21.xml><?xml version="1.0" encoding="utf-8"?>
+<p:notes xmlns:a="http://schemas.openxmlformats.org/drawingml/2006/main" xmlns:p="http://schemas.openxmlformats.org/presentationml/2006/main">
   <p:cSld>
     <p:spTree>
       <p:nvGrpSpPr>
@@ -1552,7 +2906,87 @@
           <a:lstStyle/>
           <a:p>
             <a:r>
-              <a:t>Both are honest and they answer different questions. Almost every misleading comparison in business reporting is a count presented where the reader will hear a rate.</a:t>
+              <a:t>TEACHING PURPOSE</a:t>
+            </a:r>
+          </a:p>
+          <a:p>
+            <a:r>
+              <a:t>What you can do now</a:t>
+            </a:r>
+          </a:p>
+          <a:p>
+            <a:r>
+              <a:t/>
+            </a:r>
+          </a:p>
+          <a:p>
+            <a:r>
+              <a:t>CONNECT</a:t>
+            </a:r>
+          </a:p>
+          <a:p>
+            <a:r>
+              <a:t>Build on the preceding slide: Five statements, five verdicts, with numbers.</a:t>
+            </a:r>
+          </a:p>
+          <a:p>
+            <a:r>
+              <a:t/>
+            </a:r>
+          </a:p>
+          <a:p>
+            <a:r>
+              <a:t>EXPLAIN IN ORDINARY WORDS</a:t>
+            </a:r>
+          </a:p>
+          <a:p>
+            <a:r>
+              <a:t>A percentage is out of one hundred. Moving from 10% to 15% is an increase of 5 percentage points, but 50% relative to the original 10%.</a:t>
+            </a:r>
+          </a:p>
+          <a:p>
+            <a:r>
+              <a:t/>
+            </a:r>
+          </a:p>
+          <a:p>
+            <a:r>
+              <a:t>CHECK AND EXPECTED ANSWER</a:t>
+            </a:r>
+          </a:p>
+          <a:p>
+            <a:r>
+              <a:t>From 20% to 25%: how many percentage points? 5. Relative increase? 25%.</a:t>
+            </a:r>
+          </a:p>
+          <a:p>
+            <a:r>
+              <a:t/>
+            </a:r>
+          </a:p>
+          <a:p>
+            <a:r>
+              <a:t>IF LEARNERS ARE STUCK</a:t>
+            </a:r>
+          </a:p>
+          <a:p>
+            <a:r>
+              <a:t>Write the subtraction and the division separately; label their different units.</a:t>
+            </a:r>
+          </a:p>
+          <a:p>
+            <a:r>
+              <a:t/>
+            </a:r>
+          </a:p>
+          <a:p>
+            <a:r>
+              <a:t>NEXT</a:t>
+            </a:r>
+          </a:p>
+          <a:p>
+            <a:r>
+              <a:t>Before the next session. Move on after a learner can explain the current example or required action.</a:t>
             </a:r>
           </a:p>
         </p:txBody>
@@ -1577,8 +3011,8 @@
 </p:notes>
 </file>
 
-<file path=ppt/notesSlides/notesSlide3.xml><?xml version="1.0" encoding="utf-8"?>
-<p:notes xmlns:a="http://schemas.openxmlformats.org/drawingml/2006/main" xmlns:p="http://schemas.openxmlformats.org/presentationml/2006/main" xmlns:r="http://schemas.openxmlformats.org/officeDocument/2006/relationships">
+<file path=ppt/notesSlides/notesSlide22.xml><?xml version="1.0" encoding="utf-8"?>
+<p:notes xmlns:a="http://schemas.openxmlformats.org/drawingml/2006/main" xmlns:p="http://schemas.openxmlformats.org/presentationml/2006/main">
   <p:cSld>
     <p:spTree>
       <p:nvGrpSpPr>
@@ -1620,7 +3054,106 @@
         <p:txBody>
           <a:bodyPr/>
           <a:lstStyle/>
-          <a:p/>
+          <a:p>
+            <a:r>
+              <a:t>TEACHING PURPOSE</a:t>
+            </a:r>
+          </a:p>
+          <a:p>
+            <a:r>
+              <a:t>Before the next session</a:t>
+            </a:r>
+          </a:p>
+          <a:p>
+            <a:r>
+              <a:t/>
+            </a:r>
+          </a:p>
+          <a:p>
+            <a:r>
+              <a:t>CONNECT</a:t>
+            </a:r>
+          </a:p>
+          <a:p>
+            <a:r>
+              <a:t>Build on the preceding slide: What you can do now.</a:t>
+            </a:r>
+          </a:p>
+          <a:p>
+            <a:r>
+              <a:t/>
+            </a:r>
+          </a:p>
+          <a:p>
+            <a:r>
+              <a:t>LECTURER CUE</a:t>
+            </a:r>
+          </a:p>
+          <a:p>
+            <a:r>
+              <a:t>Find a percentage quoted at work and decide whether it should have been a percentage point, a rate, or a count.</a:t>
+            </a:r>
+          </a:p>
+          <a:p>
+            <a:r>
+              <a:t/>
+            </a:r>
+          </a:p>
+          <a:p>
+            <a:r>
+              <a:t>EXPLAIN IN ORDINARY WORDS</a:t>
+            </a:r>
+          </a:p>
+          <a:p>
+            <a:r>
+              <a:t>A percentage is out of one hundred. Moving from 10% to 15% is an increase of 5 percentage points, but 50% relative to the original 10%.</a:t>
+            </a:r>
+          </a:p>
+          <a:p>
+            <a:r>
+              <a:t/>
+            </a:r>
+          </a:p>
+          <a:p>
+            <a:r>
+              <a:t>CHECK AND EXPECTED ANSWER</a:t>
+            </a:r>
+          </a:p>
+          <a:p>
+            <a:r>
+              <a:t>From 20% to 25%: how many percentage points? 5. Relative increase? 25%.</a:t>
+            </a:r>
+          </a:p>
+          <a:p>
+            <a:r>
+              <a:t/>
+            </a:r>
+          </a:p>
+          <a:p>
+            <a:r>
+              <a:t>IF LEARNERS ARE STUCK</a:t>
+            </a:r>
+          </a:p>
+          <a:p>
+            <a:r>
+              <a:t>Write the subtraction and the division separately; label their different units.</a:t>
+            </a:r>
+          </a:p>
+          <a:p>
+            <a:r>
+              <a:t/>
+            </a:r>
+          </a:p>
+          <a:p>
+            <a:r>
+              <a:t>NEXT</a:t>
+            </a:r>
+          </a:p>
+          <a:p>
+            <a:r>
+              <a:t>Rates for how bad, counts for how much work. Move on after a learner can explain the current example or required action.</a:t>
+            </a:r>
+          </a:p>
         </p:txBody>
       </p:sp>
       <p:sp>
@@ -1643,8 +3176,8 @@
 </p:notes>
 </file>
 
-<file path=ppt/notesSlides/notesSlide4.xml><?xml version="1.0" encoding="utf-8"?>
-<p:notes xmlns:a="http://schemas.openxmlformats.org/drawingml/2006/main" xmlns:p="http://schemas.openxmlformats.org/presentationml/2006/main" xmlns:r="http://schemas.openxmlformats.org/officeDocument/2006/relationships">
+<file path=ppt/notesSlides/notesSlide23.xml><?xml version="1.0" encoding="utf-8"?>
+<p:notes xmlns:a="http://schemas.openxmlformats.org/drawingml/2006/main" xmlns:p="http://schemas.openxmlformats.org/presentationml/2006/main">
   <p:cSld>
     <p:spTree>
       <p:nvGrpSpPr>
@@ -1688,7 +3221,87 @@
           <a:lstStyle/>
           <a:p>
             <a:r>
-              <a:t>These three are what tonight is marked against, in the sense that the lab checks them.</a:t>
+              <a:t>TEACHING PURPOSE</a:t>
+            </a:r>
+          </a:p>
+          <a:p>
+            <a:r>
+              <a:t>Rates for how bad, counts for how much work</a:t>
+            </a:r>
+          </a:p>
+          <a:p>
+            <a:r>
+              <a:t/>
+            </a:r>
+          </a:p>
+          <a:p>
+            <a:r>
+              <a:t>CONNECT</a:t>
+            </a:r>
+          </a:p>
+          <a:p>
+            <a:r>
+              <a:t>Build on the preceding slide: Before the next session.</a:t>
+            </a:r>
+          </a:p>
+          <a:p>
+            <a:r>
+              <a:t/>
+            </a:r>
+          </a:p>
+          <a:p>
+            <a:r>
+              <a:t>LECTURER CUE</a:t>
+            </a:r>
+          </a:p>
+          <a:p>
+            <a:r>
+              <a:t>Both are honest and they answer different questions. Almost every misleading comparison in business reporting is a count presented where the reader will hear a rate.</a:t>
+            </a:r>
+          </a:p>
+          <a:p>
+            <a:r>
+              <a:t/>
+            </a:r>
+          </a:p>
+          <a:p>
+            <a:r>
+              <a:t>EXPLAIN IN ORDINARY WORDS</a:t>
+            </a:r>
+          </a:p>
+          <a:p>
+            <a:r>
+              <a:t>A count says how much work there is. A rate divides events by the relevant opportunities or population. Both numerator and denominator must describe the same period and group.</a:t>
+            </a:r>
+          </a:p>
+          <a:p>
+            <a:r>
+              <a:t/>
+            </a:r>
+          </a:p>
+          <a:p>
+            <a:r>
+              <a:t>CHECK AND EXPECTED ANSWER</a:t>
+            </a:r>
+          </a:p>
+          <a:p>
+            <a:r>
+              <a:t>10 returns from 100 orders versus 20 from 1,000: rates are 10% and 2%. The second group has more returns but a lower rate.</a:t>
+            </a:r>
+          </a:p>
+          <a:p>
+            <a:r>
+              <a:t/>
+            </a:r>
+          </a:p>
+          <a:p>
+            <a:r>
+              <a:t>IF LEARNERS ARE STUCK</a:t>
+            </a:r>
+          </a:p>
+          <a:p>
+            <a:r>
+              <a:t>Write numerator and denominator in words before putting numbers into the fraction.</a:t>
             </a:r>
           </a:p>
         </p:txBody>
@@ -1713,8 +3326,8 @@
 </p:notes>
 </file>
 
-<file path=ppt/notesSlides/notesSlide5.xml><?xml version="1.0" encoding="utf-8"?>
-<p:notes xmlns:a="http://schemas.openxmlformats.org/drawingml/2006/main" xmlns:p="http://schemas.openxmlformats.org/presentationml/2006/main" xmlns:r="http://schemas.openxmlformats.org/officeDocument/2006/relationships">
+<file path=ppt/notesSlides/notesSlide3.xml><?xml version="1.0" encoding="utf-8"?>
+<p:notes xmlns:a="http://schemas.openxmlformats.org/drawingml/2006/main" xmlns:p="http://schemas.openxmlformats.org/presentationml/2006/main">
   <p:cSld>
     <p:spTree>
       <p:nvGrpSpPr>
@@ -1758,7 +3371,87 @@
           <a:lstStyle/>
           <a:p>
             <a:r>
-              <a:t>The region with the most returns and the region with the highest return rate are different regions. Only one of them is the answer.</a:t>
+              <a:t>TEACHING PURPOSE</a:t>
+            </a:r>
+          </a:p>
+          <a:p>
+            <a:r>
+              <a:t>The words for tonight</a:t>
+            </a:r>
+          </a:p>
+          <a:p>
+            <a:r>
+              <a:t/>
+            </a:r>
+          </a:p>
+          <a:p>
+            <a:r>
+              <a:t>CONNECT</a:t>
+            </a:r>
+          </a:p>
+          <a:p>
+            <a:r>
+              <a:t>Build on the preceding slide: Where tonight sits.</a:t>
+            </a:r>
+          </a:p>
+          <a:p>
+            <a:r>
+              <a:t/>
+            </a:r>
+          </a:p>
+          <a:p>
+            <a:r>
+              <a:t>EXPLAIN IN ORDINARY WORDS</a:t>
+            </a:r>
+          </a:p>
+          <a:p>
+            <a:r>
+              <a:t>A percentage is out of one hundred. Moving from 10% to 15% is an increase of 5 percentage points, but 50% relative to the original 10%.</a:t>
+            </a:r>
+          </a:p>
+          <a:p>
+            <a:r>
+              <a:t/>
+            </a:r>
+          </a:p>
+          <a:p>
+            <a:r>
+              <a:t>CHECK AND EXPECTED ANSWER</a:t>
+            </a:r>
+          </a:p>
+          <a:p>
+            <a:r>
+              <a:t>From 20% to 25%: how many percentage points? 5. Relative increase? 25%.</a:t>
+            </a:r>
+          </a:p>
+          <a:p>
+            <a:r>
+              <a:t/>
+            </a:r>
+          </a:p>
+          <a:p>
+            <a:r>
+              <a:t>IF LEARNERS ARE STUCK</a:t>
+            </a:r>
+          </a:p>
+          <a:p>
+            <a:r>
+              <a:t>Write the subtraction and the division separately; label their different units.</a:t>
+            </a:r>
+          </a:p>
+          <a:p>
+            <a:r>
+              <a:t/>
+            </a:r>
+          </a:p>
+          <a:p>
+            <a:r>
+              <a:t>NEXT</a:t>
+            </a:r>
+          </a:p>
+          <a:p>
+            <a:r>
+              <a:t>By the end of tonight you can…. Move on after a learner can explain the current example or required action.</a:t>
             </a:r>
           </a:p>
         </p:txBody>
@@ -1783,8 +3476,8 @@
 </p:notes>
 </file>
 
-<file path=ppt/notesSlides/notesSlide6.xml><?xml version="1.0" encoding="utf-8"?>
-<p:notes xmlns:a="http://schemas.openxmlformats.org/drawingml/2006/main" xmlns:p="http://schemas.openxmlformats.org/presentationml/2006/main" xmlns:r="http://schemas.openxmlformats.org/officeDocument/2006/relationships">
+<file path=ppt/notesSlides/notesSlide4.xml><?xml version="1.0" encoding="utf-8"?>
+<p:notes xmlns:a="http://schemas.openxmlformats.org/drawingml/2006/main" xmlns:p="http://schemas.openxmlformats.org/presentationml/2006/main">
   <p:cSld>
     <p:spTree>
       <p:nvGrpSpPr>
@@ -1828,7 +3521,102 @@
           <a:lstStyle/>
           <a:p>
             <a:r>
-              <a:t>A count divided by the population it came from. What you need whenever the groups you are comparing are different sizes, which is nearly always.</a:t>
+              <a:t>TEACHING PURPOSE</a:t>
+            </a:r>
+          </a:p>
+          <a:p>
+            <a:r>
+              <a:t>By the end of tonight you can…</a:t>
+            </a:r>
+          </a:p>
+          <a:p>
+            <a:r>
+              <a:t/>
+            </a:r>
+          </a:p>
+          <a:p>
+            <a:r>
+              <a:t>CONNECT</a:t>
+            </a:r>
+          </a:p>
+          <a:p>
+            <a:r>
+              <a:t>Build on the preceding slide: The words for tonight.</a:t>
+            </a:r>
+          </a:p>
+          <a:p>
+            <a:r>
+              <a:t/>
+            </a:r>
+          </a:p>
+          <a:p>
+            <a:r>
+              <a:t>LECTURER CUE</a:t>
+            </a:r>
+          </a:p>
+          <a:p>
+            <a:r>
+              <a:t>These three are what tonight is marked against, in the sense that the lab checks them.</a:t>
+            </a:r>
+          </a:p>
+          <a:p>
+            <a:r>
+              <a:t/>
+            </a:r>
+          </a:p>
+          <a:p>
+            <a:r>
+              <a:t>EXPLAIN IN ORDINARY WORDS</a:t>
+            </a:r>
+          </a:p>
+          <a:p>
+            <a:r>
+              <a:t>A percentage is out of one hundred. Moving from 10% to 15% is an increase of 5 percentage points, but 50% relative to the original 10%.</a:t>
+            </a:r>
+          </a:p>
+          <a:p>
+            <a:r>
+              <a:t/>
+            </a:r>
+          </a:p>
+          <a:p>
+            <a:r>
+              <a:t>CHECK AND EXPECTED ANSWER</a:t>
+            </a:r>
+          </a:p>
+          <a:p>
+            <a:r>
+              <a:t>From 20% to 25%: how many percentage points? 5. Relative increase? 25%.</a:t>
+            </a:r>
+          </a:p>
+          <a:p>
+            <a:r>
+              <a:t/>
+            </a:r>
+          </a:p>
+          <a:p>
+            <a:r>
+              <a:t>IF LEARNERS ARE STUCK</a:t>
+            </a:r>
+          </a:p>
+          <a:p>
+            <a:r>
+              <a:t>Write the subtraction and the division separately; label their different units.</a:t>
+            </a:r>
+          </a:p>
+          <a:p>
+            <a:r>
+              <a:t/>
+            </a:r>
+          </a:p>
+          <a:p>
+            <a:r>
+              <a:t>NEXT</a:t>
+            </a:r>
+          </a:p>
+          <a:p>
+            <a:r>
+              <a:t>Which region has our worst returns problem?. Move on after a learner can explain the current example or required action.</a:t>
             </a:r>
           </a:p>
         </p:txBody>
@@ -1853,8 +3641,8 @@
 </p:notes>
 </file>
 
-<file path=ppt/notesSlides/notesSlide7.xml><?xml version="1.0" encoding="utf-8"?>
-<p:notes xmlns:a="http://schemas.openxmlformats.org/drawingml/2006/main" xmlns:p="http://schemas.openxmlformats.org/presentationml/2006/main" xmlns:r="http://schemas.openxmlformats.org/officeDocument/2006/relationships">
+<file path=ppt/notesSlides/notesSlide5.xml><?xml version="1.0" encoding="utf-8"?>
+<p:notes xmlns:a="http://schemas.openxmlformats.org/drawingml/2006/main" xmlns:p="http://schemas.openxmlformats.org/presentationml/2006/main">
   <p:cSld>
     <p:spTree>
       <p:nvGrpSpPr>
@@ -1898,7 +3686,102 @@
           <a:lstStyle/>
           <a:p>
             <a:r>
-              <a:t>The unit for the DIFFERENCE between two percentages. Going from 2% to 3% is one percentage point and also a fifty per cent increase, and both statements are true.</a:t>
+              <a:t>TEACHING PURPOSE</a:t>
+            </a:r>
+          </a:p>
+          <a:p>
+            <a:r>
+              <a:t>Which region has our worst returns problem?</a:t>
+            </a:r>
+          </a:p>
+          <a:p>
+            <a:r>
+              <a:t/>
+            </a:r>
+          </a:p>
+          <a:p>
+            <a:r>
+              <a:t>CONNECT</a:t>
+            </a:r>
+          </a:p>
+          <a:p>
+            <a:r>
+              <a:t>Build on the preceding slide: By the end of tonight you can….</a:t>
+            </a:r>
+          </a:p>
+          <a:p>
+            <a:r>
+              <a:t/>
+            </a:r>
+          </a:p>
+          <a:p>
+            <a:r>
+              <a:t>LECTURER CUE</a:t>
+            </a:r>
+          </a:p>
+          <a:p>
+            <a:r>
+              <a:t>The region with the most returns and the region with the highest return rate are different regions. Only one of them is the answer.</a:t>
+            </a:r>
+          </a:p>
+          <a:p>
+            <a:r>
+              <a:t/>
+            </a:r>
+          </a:p>
+          <a:p>
+            <a:r>
+              <a:t>EXPLAIN IN ORDINARY WORDS</a:t>
+            </a:r>
+          </a:p>
+          <a:p>
+            <a:r>
+              <a:t>A function is a named set of instructions. def defines it; a call runs it with inputs. Parameters are input names, arguments are supplied values, and return sends the result back.</a:t>
+            </a:r>
+          </a:p>
+          <a:p>
+            <a:r>
+              <a:t/>
+            </a:r>
+          </a:p>
+          <a:p>
+            <a:r>
+              <a:t>CHECK AND EXPECTED ANSWER</a:t>
+            </a:r>
+          </a:p>
+          <a:p>
+            <a:r>
+              <a:t>Does print(8) return the number 8 to the caller? No; it displays 8 and returns None. A function needing a numeric result should return it.</a:t>
+            </a:r>
+          </a:p>
+          <a:p>
+            <a:r>
+              <a:t/>
+            </a:r>
+          </a:p>
+          <a:p>
+            <a:r>
+              <a:t>IF LEARNERS ARE STUCK</a:t>
+            </a:r>
+          </a:p>
+          <a:p>
+            <a:r>
+              <a:t>Trace one call: bind input names, run the indented body, reach return, then put the returned result back into the calling expression.</a:t>
+            </a:r>
+          </a:p>
+          <a:p>
+            <a:r>
+              <a:t/>
+            </a:r>
+          </a:p>
+          <a:p>
+            <a:r>
+              <a:t>NEXT</a:t>
+            </a:r>
+          </a:p>
+          <a:p>
+            <a:r>
+              <a:t>Counts, rates, and the difference that changes the decision. Move on after a learner can explain the current example or required action.</a:t>
             </a:r>
           </a:p>
         </p:txBody>
@@ -1923,8 +3806,8 @@
 </p:notes>
 </file>
 
-<file path=ppt/notesSlides/notesSlide8.xml><?xml version="1.0" encoding="utf-8"?>
-<p:notes xmlns:a="http://schemas.openxmlformats.org/drawingml/2006/main" xmlns:p="http://schemas.openxmlformats.org/presentationml/2006/main" xmlns:r="http://schemas.openxmlformats.org/officeDocument/2006/relationships">
+<file path=ppt/notesSlides/notesSlide6.xml><?xml version="1.0" encoding="utf-8"?>
+<p:notes xmlns:a="http://schemas.openxmlformats.org/drawingml/2006/main" xmlns:p="http://schemas.openxmlformats.org/presentationml/2006/main">
   <p:cSld>
     <p:spTree>
       <p:nvGrpSpPr>
@@ -1968,7 +3851,102 @@
           <a:lstStyle/>
           <a:p>
             <a:r>
-              <a:t>A pattern that repeats on the calendar. It is not growth and it is not a trend, and confusing either with it produces a confident wrong headline every January.</a:t>
+              <a:t>TEACHING PURPOSE</a:t>
+            </a:r>
+          </a:p>
+          <a:p>
+            <a:r>
+              <a:t>A rate</a:t>
+            </a:r>
+          </a:p>
+          <a:p>
+            <a:r>
+              <a:t/>
+            </a:r>
+          </a:p>
+          <a:p>
+            <a:r>
+              <a:t>CONNECT</a:t>
+            </a:r>
+          </a:p>
+          <a:p>
+            <a:r>
+              <a:t>Build on the preceding slide: Counts, rates, and the difference that changes the decision.</a:t>
+            </a:r>
+          </a:p>
+          <a:p>
+            <a:r>
+              <a:t/>
+            </a:r>
+          </a:p>
+          <a:p>
+            <a:r>
+              <a:t>LECTURER CUE</a:t>
+            </a:r>
+          </a:p>
+          <a:p>
+            <a:r>
+              <a:t>A count divided by the population it came from. What you need whenever the groups you are comparing are different sizes, which is nearly always.</a:t>
+            </a:r>
+          </a:p>
+          <a:p>
+            <a:r>
+              <a:t/>
+            </a:r>
+          </a:p>
+          <a:p>
+            <a:r>
+              <a:t>EXPLAIN IN ORDINARY WORDS</a:t>
+            </a:r>
+          </a:p>
+          <a:p>
+            <a:r>
+              <a:t>A count says how much work there is. A rate divides events by the relevant opportunities or population. Both numerator and denominator must describe the same period and group.</a:t>
+            </a:r>
+          </a:p>
+          <a:p>
+            <a:r>
+              <a:t/>
+            </a:r>
+          </a:p>
+          <a:p>
+            <a:r>
+              <a:t>CHECK AND EXPECTED ANSWER</a:t>
+            </a:r>
+          </a:p>
+          <a:p>
+            <a:r>
+              <a:t>10 returns from 100 orders versus 20 from 1,000: rates are 10% and 2%. The second group has more returns but a lower rate.</a:t>
+            </a:r>
+          </a:p>
+          <a:p>
+            <a:r>
+              <a:t/>
+            </a:r>
+          </a:p>
+          <a:p>
+            <a:r>
+              <a:t>IF LEARNERS ARE STUCK</a:t>
+            </a:r>
+          </a:p>
+          <a:p>
+            <a:r>
+              <a:t>Write numerator and denominator in words before putting numbers into the fraction.</a:t>
+            </a:r>
+          </a:p>
+          <a:p>
+            <a:r>
+              <a:t/>
+            </a:r>
+          </a:p>
+          <a:p>
+            <a:r>
+              <a:t>NEXT</a:t>
+            </a:r>
+          </a:p>
+          <a:p>
+            <a:r>
+              <a:t>Percentage point. Move on after a learner can explain the current example or required action.</a:t>
             </a:r>
           </a:p>
         </p:txBody>
@@ -1993,8 +3971,8 @@
 </p:notes>
 </file>
 
-<file path=ppt/notesSlides/notesSlide9.xml><?xml version="1.0" encoding="utf-8"?>
-<p:notes xmlns:a="http://schemas.openxmlformats.org/drawingml/2006/main" xmlns:p="http://schemas.openxmlformats.org/presentationml/2006/main" xmlns:r="http://schemas.openxmlformats.org/officeDocument/2006/relationships">
+<file path=ppt/notesSlides/notesSlide7.xml><?xml version="1.0" encoding="utf-8"?>
+<p:notes xmlns:a="http://schemas.openxmlformats.org/drawingml/2006/main" xmlns:p="http://schemas.openxmlformats.org/presentationml/2006/main">
   <p:cSld>
     <p:spTree>
       <p:nvGrpSpPr>
@@ -2038,7 +4016,432 @@
           <a:lstStyle/>
           <a:p>
             <a:r>
+              <a:t>TEACHING PURPOSE</a:t>
+            </a:r>
+          </a:p>
+          <a:p>
+            <a:r>
+              <a:t>Percentage point</a:t>
+            </a:r>
+          </a:p>
+          <a:p>
+            <a:r>
+              <a:t/>
+            </a:r>
+          </a:p>
+          <a:p>
+            <a:r>
+              <a:t>CONNECT</a:t>
+            </a:r>
+          </a:p>
+          <a:p>
+            <a:r>
+              <a:t>Build on the preceding slide: A rate.</a:t>
+            </a:r>
+          </a:p>
+          <a:p>
+            <a:r>
+              <a:t/>
+            </a:r>
+          </a:p>
+          <a:p>
+            <a:r>
+              <a:t>LECTURER CUE</a:t>
+            </a:r>
+          </a:p>
+          <a:p>
+            <a:r>
+              <a:t>The unit for the DIFFERENCE between two percentages. Going from 2% to 3% is one percentage point and also a fifty per cent increase, and both statements are true.</a:t>
+            </a:r>
+          </a:p>
+          <a:p>
+            <a:r>
+              <a:t/>
+            </a:r>
+          </a:p>
+          <a:p>
+            <a:r>
+              <a:t>EXPLAIN IN ORDINARY WORDS</a:t>
+            </a:r>
+          </a:p>
+          <a:p>
+            <a:r>
+              <a:t>A percentage is out of one hundred. Moving from 10% to 15% is an increase of 5 percentage points, but 50% relative to the original 10%.</a:t>
+            </a:r>
+          </a:p>
+          <a:p>
+            <a:r>
+              <a:t/>
+            </a:r>
+          </a:p>
+          <a:p>
+            <a:r>
+              <a:t>CHECK AND EXPECTED ANSWER</a:t>
+            </a:r>
+          </a:p>
+          <a:p>
+            <a:r>
+              <a:t>From 20% to 25%: how many percentage points? 5. Relative increase? 25%.</a:t>
+            </a:r>
+          </a:p>
+          <a:p>
+            <a:r>
+              <a:t/>
+            </a:r>
+          </a:p>
+          <a:p>
+            <a:r>
+              <a:t>IF LEARNERS ARE STUCK</a:t>
+            </a:r>
+          </a:p>
+          <a:p>
+            <a:r>
+              <a:t>Write the subtraction and the division separately; label their different units.</a:t>
+            </a:r>
+          </a:p>
+          <a:p>
+            <a:r>
+              <a:t/>
+            </a:r>
+          </a:p>
+          <a:p>
+            <a:r>
+              <a:t>NEXT</a:t>
+            </a:r>
+          </a:p>
+          <a:p>
+            <a:r>
+              <a:t>Seasonality. Move on after a learner can explain the current example or required action.</a:t>
+            </a:r>
+          </a:p>
+        </p:txBody>
+      </p:sp>
+      <p:sp>
+        <p:nvSpPr>
+          <p:cNvPr id="4" name="Slide Number Placeholder 3"/>
+          <p:cNvSpPr>
+            <a:spLocks noGrp="1"/>
+          </p:cNvSpPr>
+          <p:nvPr>
+            <p:ph type="sldNum" idx="5" sz="quarter"/>
+          </p:nvPr>
+        </p:nvSpPr>
+        <p:spPr/>
+      </p:sp>
+    </p:spTree>
+  </p:cSld>
+  <p:clrMapOvr>
+    <a:masterClrMapping/>
+  </p:clrMapOvr>
+</p:notes>
+</file>
+
+<file path=ppt/notesSlides/notesSlide8.xml><?xml version="1.0" encoding="utf-8"?>
+<p:notes xmlns:a="http://schemas.openxmlformats.org/drawingml/2006/main" xmlns:p="http://schemas.openxmlformats.org/presentationml/2006/main">
+  <p:cSld>
+    <p:spTree>
+      <p:nvGrpSpPr>
+        <p:cNvPr id="1" name=""/>
+        <p:cNvGrpSpPr/>
+        <p:nvPr/>
+      </p:nvGrpSpPr>
+      <p:grpSpPr>
+        <a:xfrm>
+          <a:off x="0" y="0"/>
+          <a:ext cx="0" cy="0"/>
+          <a:chOff x="0" y="0"/>
+          <a:chExt cx="0" cy="0"/>
+        </a:xfrm>
+      </p:grpSpPr>
+      <p:sp>
+        <p:nvSpPr>
+          <p:cNvPr id="2" name="Slide Image Placeholder 1"/>
+          <p:cNvSpPr>
+            <a:spLocks noGrp="1"/>
+          </p:cNvSpPr>
+          <p:nvPr>
+            <p:ph type="sldImg" idx="2"/>
+          </p:nvPr>
+        </p:nvSpPr>
+        <p:spPr/>
+      </p:sp>
+      <p:sp>
+        <p:nvSpPr>
+          <p:cNvPr id="3" name="Notes Placeholder 2"/>
+          <p:cNvSpPr>
+            <a:spLocks noGrp="1"/>
+          </p:cNvSpPr>
+          <p:nvPr>
+            <p:ph type="body" idx="3" sz="quarter"/>
+          </p:nvPr>
+        </p:nvSpPr>
+        <p:spPr/>
+        <p:txBody>
+          <a:bodyPr/>
+          <a:lstStyle/>
+          <a:p>
+            <a:r>
+              <a:t>TEACHING PURPOSE</a:t>
+            </a:r>
+          </a:p>
+          <a:p>
+            <a:r>
+              <a:t>Seasonality</a:t>
+            </a:r>
+          </a:p>
+          <a:p>
+            <a:r>
+              <a:t/>
+            </a:r>
+          </a:p>
+          <a:p>
+            <a:r>
+              <a:t>CONNECT</a:t>
+            </a:r>
+          </a:p>
+          <a:p>
+            <a:r>
+              <a:t>Build on the preceding slide: Percentage point.</a:t>
+            </a:r>
+          </a:p>
+          <a:p>
+            <a:r>
+              <a:t/>
+            </a:r>
+          </a:p>
+          <a:p>
+            <a:r>
+              <a:t>LECTURER CUE</a:t>
+            </a:r>
+          </a:p>
+          <a:p>
+            <a:r>
+              <a:t>A pattern that repeats on the calendar. It is not growth and it is not a trend, and confusing either with it produces a confident wrong headline every January.</a:t>
+            </a:r>
+          </a:p>
+          <a:p>
+            <a:r>
+              <a:t/>
+            </a:r>
+          </a:p>
+          <a:p>
+            <a:r>
+              <a:t>EXPLAIN IN ORDINARY WORDS</a:t>
+            </a:r>
+          </a:p>
+          <a:p>
+            <a:r>
+              <a:t>A seasonal pattern repeats at calendar intervals. Compare like periods before calling a change growth; compare counts, coverage and definitions as well.</a:t>
+            </a:r>
+          </a:p>
+          <a:p>
+            <a:r>
+              <a:t/>
+            </a:r>
+          </a:p>
+          <a:p>
+            <a:r>
+              <a:t>CHECK AND EXPECTED ANSWER</a:t>
+            </a:r>
+          </a:p>
+          <a:p>
+            <a:r>
+              <a:t>Does a rise from November to December prove underlying growth? No; compare comparable Decembers and inspect the wider series.</a:t>
+            </a:r>
+          </a:p>
+          <a:p>
+            <a:r>
+              <a:t/>
+            </a:r>
+          </a:p>
+          <a:p>
+            <a:r>
+              <a:t>IF LEARNERS ARE STUCK</a:t>
+            </a:r>
+          </a:p>
+          <a:p>
+            <a:r>
+              <a:t>Draw a two-year timeline and match the same months. Separate description from an explanation of cause.</a:t>
+            </a:r>
+          </a:p>
+          <a:p>
+            <a:r>
+              <a:t/>
+            </a:r>
+          </a:p>
+          <a:p>
+            <a:r>
+              <a:t>NEXT</a:t>
+            </a:r>
+          </a:p>
+          <a:p>
+            <a:r>
+              <a:t>Year on year. Move on after a learner can explain the current example or required action.</a:t>
+            </a:r>
+          </a:p>
+        </p:txBody>
+      </p:sp>
+      <p:sp>
+        <p:nvSpPr>
+          <p:cNvPr id="4" name="Slide Number Placeholder 3"/>
+          <p:cNvSpPr>
+            <a:spLocks noGrp="1"/>
+          </p:cNvSpPr>
+          <p:nvPr>
+            <p:ph type="sldNum" idx="5" sz="quarter"/>
+          </p:nvPr>
+        </p:nvSpPr>
+        <p:spPr/>
+      </p:sp>
+    </p:spTree>
+  </p:cSld>
+  <p:clrMapOvr>
+    <a:masterClrMapping/>
+  </p:clrMapOvr>
+</p:notes>
+</file>
+
+<file path=ppt/notesSlides/notesSlide9.xml><?xml version="1.0" encoding="utf-8"?>
+<p:notes xmlns:a="http://schemas.openxmlformats.org/drawingml/2006/main" xmlns:p="http://schemas.openxmlformats.org/presentationml/2006/main">
+  <p:cSld>
+    <p:spTree>
+      <p:nvGrpSpPr>
+        <p:cNvPr id="1" name=""/>
+        <p:cNvGrpSpPr/>
+        <p:nvPr/>
+      </p:nvGrpSpPr>
+      <p:grpSpPr>
+        <a:xfrm>
+          <a:off x="0" y="0"/>
+          <a:ext cx="0" cy="0"/>
+          <a:chOff x="0" y="0"/>
+          <a:chExt cx="0" cy="0"/>
+        </a:xfrm>
+      </p:grpSpPr>
+      <p:sp>
+        <p:nvSpPr>
+          <p:cNvPr id="2" name="Slide Image Placeholder 1"/>
+          <p:cNvSpPr>
+            <a:spLocks noGrp="1"/>
+          </p:cNvSpPr>
+          <p:nvPr>
+            <p:ph type="sldImg" idx="2"/>
+          </p:nvPr>
+        </p:nvSpPr>
+        <p:spPr/>
+      </p:sp>
+      <p:sp>
+        <p:nvSpPr>
+          <p:cNvPr id="3" name="Notes Placeholder 2"/>
+          <p:cNvSpPr>
+            <a:spLocks noGrp="1"/>
+          </p:cNvSpPr>
+          <p:nvPr>
+            <p:ph type="body" idx="3" sz="quarter"/>
+          </p:nvPr>
+        </p:nvSpPr>
+        <p:spPr/>
+        <p:txBody>
+          <a:bodyPr/>
+          <a:lstStyle/>
+          <a:p>
+            <a:r>
+              <a:t>TEACHING PURPOSE</a:t>
+            </a:r>
+          </a:p>
+          <a:p>
+            <a:r>
+              <a:t>Year on year</a:t>
+            </a:r>
+          </a:p>
+          <a:p>
+            <a:r>
+              <a:t/>
+            </a:r>
+          </a:p>
+          <a:p>
+            <a:r>
+              <a:t>CONNECT</a:t>
+            </a:r>
+          </a:p>
+          <a:p>
+            <a:r>
+              <a:t>Build on the preceding slide: Seasonality.</a:t>
+            </a:r>
+          </a:p>
+          <a:p>
+            <a:r>
+              <a:t/>
+            </a:r>
+          </a:p>
+          <a:p>
+            <a:r>
+              <a:t>LECTURER CUE</a:t>
+            </a:r>
+          </a:p>
+          <a:p>
+            <a:r>
               <a:t>Comparing a period against the same period a year earlier. It is the simplest honest way to see through seasonality.</a:t>
+            </a:r>
+          </a:p>
+          <a:p>
+            <a:r>
+              <a:t/>
+            </a:r>
+          </a:p>
+          <a:p>
+            <a:r>
+              <a:t>EXPLAIN IN ORDINARY WORDS</a:t>
+            </a:r>
+          </a:p>
+          <a:p>
+            <a:r>
+              <a:t>A seasonal pattern repeats at calendar intervals. Compare like periods before calling a change growth; compare counts, coverage and definitions as well.</a:t>
+            </a:r>
+          </a:p>
+          <a:p>
+            <a:r>
+              <a:t/>
+            </a:r>
+          </a:p>
+          <a:p>
+            <a:r>
+              <a:t>CHECK AND EXPECTED ANSWER</a:t>
+            </a:r>
+          </a:p>
+          <a:p>
+            <a:r>
+              <a:t>Does a rise from November to December prove underlying growth? No; compare comparable Decembers and inspect the wider series.</a:t>
+            </a:r>
+          </a:p>
+          <a:p>
+            <a:r>
+              <a:t/>
+            </a:r>
+          </a:p>
+          <a:p>
+            <a:r>
+              <a:t>IF LEARNERS ARE STUCK</a:t>
+            </a:r>
+          </a:p>
+          <a:p>
+            <a:r>
+              <a:t>Draw a two-year timeline and match the same months. Separate description from an explanation of cause.</a:t>
+            </a:r>
+          </a:p>
+          <a:p>
+            <a:r>
+              <a:t/>
+            </a:r>
+          </a:p>
+          <a:p>
+            <a:r>
+              <a:t>NEXT</a:t>
+            </a:r>
+          </a:p>
+          <a:p>
+            <a:r>
+              <a:t>The most returns and the highest return rate are different regions. Move on after a learner can explain the current example or required action.</a:t>
             </a:r>
           </a:p>
         </p:txBody>
@@ -6643,7 +9046,7 @@
                 </a:solidFill>
                 <a:latin typeface="Calibri"/>
               </a:rPr>
-              <a:t>Time. Resample to a month, then a moving average, then the question that matters: is this growth or is it the calendar? December against February in both years, and year on year as the test. Same data, two arithmetics, o</a:t>
+              <a:t>Time.</a:t>
             </a:r>
           </a:p>
         </p:txBody>
@@ -8819,7 +11222,7 @@
         <p:spPr>
           <a:xfrm>
             <a:off x="685800" y="1600200"/>
-            <a:ext cx="10820095" cy="1100371"/>
+            <a:ext cx="10820095" cy="1603291"/>
           </a:xfrm>
           <a:prstGeom prst="rect">
             <a:avLst/>
@@ -8860,7 +11263,7 @@
         </p:nvSpPr>
         <p:spPr>
           <a:xfrm>
-            <a:off x="685800" y="2792011"/>
+            <a:off x="685800" y="3477811"/>
             <a:ext cx="10820095" cy="457200"/>
           </a:xfrm>
           <a:prstGeom prst="rect">
@@ -11966,7 +14369,7 @@
         <p:spPr>
           <a:xfrm>
             <a:off x="685800" y="1911095"/>
-            <a:ext cx="10820095" cy="1243584"/>
+            <a:ext cx="10820095" cy="1617199"/>
           </a:xfrm>
           <a:prstGeom prst="roundRect">
             <a:avLst>
@@ -12011,7 +14414,7 @@
         <p:spPr>
           <a:xfrm>
             <a:off x="978408" y="2112264"/>
-            <a:ext cx="10234879" cy="877823"/>
+            <a:ext cx="10234879" cy="1251439"/>
           </a:xfrm>
           <a:prstGeom prst="rect">
             <a:avLst/>
@@ -12052,7 +14455,7 @@
         </p:nvSpPr>
         <p:spPr>
           <a:xfrm>
-            <a:off x="685800" y="3465575"/>
+            <a:off x="685800" y="3802615"/>
             <a:ext cx="10820095" cy="310896"/>
           </a:xfrm>
           <a:prstGeom prst="rect">
@@ -12078,7 +14481,7 @@
                 </a:solidFill>
                 <a:latin typeface="Calibri"/>
               </a:rPr>
-              <a:t>Work these questions in order:</a:t>
+              <a:t>Work these questions in order</a:t>
             </a:r>
           </a:p>
         </p:txBody>
@@ -12091,8 +14494,8 @@
         </p:nvSpPr>
         <p:spPr>
           <a:xfrm>
-            <a:off x="685800" y="3886200"/>
-            <a:ext cx="5227167" cy="365760"/>
+            <a:off x="685800" y="4278103"/>
+            <a:ext cx="5227167" cy="385501"/>
           </a:xfrm>
           <a:prstGeom prst="rect">
             <a:avLst/>
@@ -12120,7 +14523,7 @@
                 </a:solidFill>
                 <a:latin typeface="Calibri"/>
               </a:rPr>
-              <a:t>→  For each: supported, unsupported, or unanswerable?</a:t>
+              <a:t>For each: supported, unsupported, or unanswerable?</a:t>
             </a:r>
           </a:p>
         </p:txBody>
@@ -12133,8 +14536,8 @@
         </p:nvSpPr>
         <p:spPr>
           <a:xfrm>
-            <a:off x="685800" y="4306824"/>
-            <a:ext cx="5227167" cy="365760"/>
+            <a:off x="685800" y="4755045"/>
+            <a:ext cx="5227167" cy="385501"/>
           </a:xfrm>
           <a:prstGeom prst="rect">
             <a:avLst/>
@@ -12162,7 +14565,7 @@
                 </a:solidFill>
                 <a:latin typeface="Calibri"/>
               </a:rPr>
-              <a:t>→  Which statistic would you have to compute to decide?</a:t>
+              <a:t>Which statistic would you have to compute to decide?</a:t>
             </a:r>
           </a:p>
         </p:txBody>
@@ -12175,8 +14578,8 @@
         </p:nvSpPr>
         <p:spPr>
           <a:xfrm>
-            <a:off x="685800" y="4727448"/>
-            <a:ext cx="5227167" cy="365760"/>
+            <a:off x="685800" y="5231987"/>
+            <a:ext cx="5227167" cy="385501"/>
           </a:xfrm>
           <a:prstGeom prst="rect">
             <a:avLst/>
@@ -12204,7 +14607,7 @@
                 </a:solidFill>
                 <a:latin typeface="Calibri"/>
               </a:rPr>
-              <a:t>→  Compute it. Write the number beside your verdict.</a:t>
+              <a:t>Compute it. Write the number beside your verdict.</a:t>
             </a:r>
           </a:p>
         </p:txBody>
@@ -12217,8 +14620,8 @@
         </p:nvSpPr>
         <p:spPr>
           <a:xfrm>
-            <a:off x="6278727" y="3886200"/>
-            <a:ext cx="5227167" cy="365760"/>
+            <a:off x="6278727" y="4278103"/>
+            <a:ext cx="5227167" cy="697851"/>
           </a:xfrm>
           <a:prstGeom prst="rect">
             <a:avLst/>
@@ -12246,7 +14649,7 @@
                 </a:solidFill>
                 <a:latin typeface="Calibri"/>
               </a:rPr>
-              <a:t>→  For the unanswerable one: what would you have to go and ask?</a:t>
+              <a:t>For the unanswerable one: what would you have to go and ask?</a:t>
             </a:r>
           </a:p>
         </p:txBody>
@@ -12259,8 +14662,8 @@
         </p:nvSpPr>
         <p:spPr>
           <a:xfrm>
-            <a:off x="6278727" y="4306824"/>
-            <a:ext cx="5227167" cy="365760"/>
+            <a:off x="6278727" y="5067395"/>
+            <a:ext cx="5227167" cy="697851"/>
           </a:xfrm>
           <a:prstGeom prst="rect">
             <a:avLst/>
@@ -12288,7 +14691,7 @@
                 </a:solidFill>
                 <a:latin typeface="Calibri"/>
               </a:rPr>
-              <a:t>→  Then one of your own: a statement about your own work data that you now suspect is unsupported.</a:t>
+              <a:t>Then one of your own: a statement about your own work data that you now suspect is unsupported.</a:t>
             </a:r>
           </a:p>
         </p:txBody>
@@ -15340,7 +17743,7 @@
                 </a:solidFill>
                 <a:latin typeface="Calibri"/>
               </a:rPr>
-              <a:t>Counts against rates, on the returns data where the two disagree: one region has the most returns and another has the highest rate, and they call for different actions. Then percentages, and percentage points, which get </a:t>
+              <a:t>Counts against rates, on the returns data where the two disagree: one region has the most returns and another has the highest rate, and they call for different actions.</a:t>
             </a:r>
           </a:p>
         </p:txBody>
